--- a/doku/emLab_Blockschaltbild.pptx
+++ b/doku/emLab_Blockschaltbild.pptx
@@ -133,6 +133,38 @@
 <file path=ppt/changesInfos/changesInfo1.xml><?xml version="1.0" encoding="utf-8"?>
 <pc:chgInfo xmlns:a="http://schemas.openxmlformats.org/drawingml/2006/main" xmlns:r="http://schemas.openxmlformats.org/officeDocument/2006/relationships" xmlns:ac="http://schemas.microsoft.com/office/drawing/2013/main/command" xmlns:pc="http://schemas.microsoft.com/office/powerpoint/2013/main/command">
   <pc:docChgLst>
+    <pc:chgData name="ZUDRELL-KOCH Stefan" userId="e9a6a590-508e-40e7-9af9-9f85dae119b7" providerId="ADAL" clId="{846EB65E-710E-4465-9ABC-D154F07DDBCE}"/>
+    <pc:docChg chg="custSel modSld">
+      <pc:chgData name="ZUDRELL-KOCH Stefan" userId="e9a6a590-508e-40e7-9af9-9f85dae119b7" providerId="ADAL" clId="{846EB65E-710E-4465-9ABC-D154F07DDBCE}" dt="2026-09-06T13:14:10.115" v="17" actId="1076"/>
+      <pc:docMkLst>
+        <pc:docMk/>
+      </pc:docMkLst>
+      <pc:sldChg chg="addSp modSp mod">
+        <pc:chgData name="ZUDRELL-KOCH Stefan" userId="e9a6a590-508e-40e7-9af9-9f85dae119b7" providerId="ADAL" clId="{846EB65E-710E-4465-9ABC-D154F07DDBCE}" dt="2026-09-06T13:14:10.115" v="17" actId="1076"/>
+        <pc:sldMkLst>
+          <pc:docMk/>
+          <pc:sldMk cId="1526945579" sldId="256"/>
+        </pc:sldMkLst>
+        <pc:spChg chg="add mod">
+          <ac:chgData name="ZUDRELL-KOCH Stefan" userId="e9a6a590-508e-40e7-9af9-9f85dae119b7" providerId="ADAL" clId="{846EB65E-710E-4465-9ABC-D154F07DDBCE}" dt="2026-09-06T13:14:10.115" v="17" actId="1076"/>
+          <ac:spMkLst>
+            <pc:docMk/>
+            <pc:sldMk cId="1526945579" sldId="256"/>
+            <ac:spMk id="69" creationId="{DE1E0CAD-3FE6-24CD-C081-F1B230365597}"/>
+          </ac:spMkLst>
+        </pc:spChg>
+        <pc:cxnChg chg="add mod">
+          <ac:chgData name="ZUDRELL-KOCH Stefan" userId="e9a6a590-508e-40e7-9af9-9f85dae119b7" providerId="ADAL" clId="{846EB65E-710E-4465-9ABC-D154F07DDBCE}" dt="2026-09-06T13:13:56.244" v="3" actId="14100"/>
+          <ac:cxnSpMkLst>
+            <pc:docMk/>
+            <pc:sldMk cId="1526945579" sldId="256"/>
+            <ac:cxnSpMk id="34" creationId="{BDB01C14-BE19-EEF7-5228-DE64F36FB1D6}"/>
+          </ac:cxnSpMkLst>
+        </pc:cxnChg>
+      </pc:sldChg>
+    </pc:docChg>
+  </pc:docChgLst>
+  <pc:docChgLst>
     <pc:chgData name="ZUDRELL-KOCH Stefan" userId="e9a6a590-508e-40e7-9af9-9f85dae119b7" providerId="ADAL" clId="{5B748AC7-C77E-493C-A77B-D94156955FEA}"/>
     <pc:docChg chg="undo custSel delSld modSld">
       <pc:chgData name="ZUDRELL-KOCH Stefan" userId="e9a6a590-508e-40e7-9af9-9f85dae119b7" providerId="ADAL" clId="{5B748AC7-C77E-493C-A77B-D94156955FEA}" dt="2026-09-01T14:34:57.566" v="1288" actId="1076"/>
@@ -169,14 +201,6 @@
             <ac:spMk id="4" creationId="{91778D7A-74A4-3E25-B31D-278B0042B992}"/>
           </ac:spMkLst>
         </pc:spChg>
-        <pc:spChg chg="del">
-          <ac:chgData name="ZUDRELL-KOCH Stefan" userId="e9a6a590-508e-40e7-9af9-9f85dae119b7" providerId="ADAL" clId="{5B748AC7-C77E-493C-A77B-D94156955FEA}" dt="2026-08-27T13:43:30.709" v="66" actId="478"/>
-          <ac:spMkLst>
-            <pc:docMk/>
-            <pc:sldMk cId="1526945579" sldId="256"/>
-            <ac:spMk id="5" creationId="{DE09C72C-A740-05E0-E4F1-D2AD3D0AFB0F}"/>
-          </ac:spMkLst>
-        </pc:spChg>
         <pc:spChg chg="mod">
           <ac:chgData name="ZUDRELL-KOCH Stefan" userId="e9a6a590-508e-40e7-9af9-9f85dae119b7" providerId="ADAL" clId="{5B748AC7-C77E-493C-A77B-D94156955FEA}" dt="2026-09-01T14:29:36.407" v="1207"/>
           <ac:spMkLst>
@@ -241,22 +265,6 @@
             <ac:spMk id="21" creationId="{D0D529A5-C989-F0CB-B608-D4D6A603BA32}"/>
           </ac:spMkLst>
         </pc:spChg>
-        <pc:spChg chg="del mod">
-          <ac:chgData name="ZUDRELL-KOCH Stefan" userId="e9a6a590-508e-40e7-9af9-9f85dae119b7" providerId="ADAL" clId="{5B748AC7-C77E-493C-A77B-D94156955FEA}" dt="2026-08-27T14:39:10.140" v="283" actId="478"/>
-          <ac:spMkLst>
-            <pc:docMk/>
-            <pc:sldMk cId="1526945579" sldId="256"/>
-            <ac:spMk id="22" creationId="{5F51A548-4252-0FE3-4593-B7B0F232F00F}"/>
-          </ac:spMkLst>
-        </pc:spChg>
-        <pc:spChg chg="del mod">
-          <ac:chgData name="ZUDRELL-KOCH Stefan" userId="e9a6a590-508e-40e7-9af9-9f85dae119b7" providerId="ADAL" clId="{5B748AC7-C77E-493C-A77B-D94156955FEA}" dt="2026-08-27T14:39:08.128" v="282" actId="478"/>
-          <ac:spMkLst>
-            <pc:docMk/>
-            <pc:sldMk cId="1526945579" sldId="256"/>
-            <ac:spMk id="23" creationId="{5B734738-11B3-5AE6-FFC2-457666F6EC7D}"/>
-          </ac:spMkLst>
-        </pc:spChg>
         <pc:spChg chg="mod">
           <ac:chgData name="ZUDRELL-KOCH Stefan" userId="e9a6a590-508e-40e7-9af9-9f85dae119b7" providerId="ADAL" clId="{5B748AC7-C77E-493C-A77B-D94156955FEA}" dt="2026-09-01T14:29:40.459" v="1209" actId="571"/>
           <ac:spMkLst>
@@ -313,14 +321,6 @@
             <ac:spMk id="33" creationId="{4DEBECE7-20C8-2CC5-D84B-6E299FC5B663}"/>
           </ac:spMkLst>
         </pc:spChg>
-        <pc:spChg chg="del mod">
-          <ac:chgData name="ZUDRELL-KOCH Stefan" userId="e9a6a590-508e-40e7-9af9-9f85dae119b7" providerId="ADAL" clId="{5B748AC7-C77E-493C-A77B-D94156955FEA}" dt="2026-09-01T09:58:07.388" v="1058" actId="478"/>
-          <ac:spMkLst>
-            <pc:docMk/>
-            <pc:sldMk cId="1526945579" sldId="256"/>
-            <ac:spMk id="34" creationId="{46CFCCC2-FDDC-D145-603F-81ED8B3ECE00}"/>
-          </ac:spMkLst>
-        </pc:spChg>
         <pc:spChg chg="mod">
           <ac:chgData name="ZUDRELL-KOCH Stefan" userId="e9a6a590-508e-40e7-9af9-9f85dae119b7" providerId="ADAL" clId="{5B748AC7-C77E-493C-A77B-D94156955FEA}" dt="2026-09-01T10:01:46.367" v="1156" actId="113"/>
           <ac:spMkLst>
@@ -361,22 +361,6 @@
             <ac:spMk id="41" creationId="{0FA5F027-748F-934C-02EF-167BFBBA112F}"/>
           </ac:spMkLst>
         </pc:spChg>
-        <pc:spChg chg="del mod">
-          <ac:chgData name="ZUDRELL-KOCH Stefan" userId="e9a6a590-508e-40e7-9af9-9f85dae119b7" providerId="ADAL" clId="{5B748AC7-C77E-493C-A77B-D94156955FEA}" dt="2026-08-27T14:52:51.571" v="386" actId="478"/>
-          <ac:spMkLst>
-            <pc:docMk/>
-            <pc:sldMk cId="1526945579" sldId="256"/>
-            <ac:spMk id="43" creationId="{62AABF83-EF81-8A49-295F-54107D706555}"/>
-          </ac:spMkLst>
-        </pc:spChg>
-        <pc:spChg chg="del mod">
-          <ac:chgData name="ZUDRELL-KOCH Stefan" userId="e9a6a590-508e-40e7-9af9-9f85dae119b7" providerId="ADAL" clId="{5B748AC7-C77E-493C-A77B-D94156955FEA}" dt="2026-08-27T14:52:51.571" v="386" actId="478"/>
-          <ac:spMkLst>
-            <pc:docMk/>
-            <pc:sldMk cId="1526945579" sldId="256"/>
-            <ac:spMk id="46" creationId="{267F1607-9B14-E969-A6DD-42A52F9E0B5F}"/>
-          </ac:spMkLst>
-        </pc:spChg>
         <pc:spChg chg="add mod">
           <ac:chgData name="ZUDRELL-KOCH Stefan" userId="e9a6a590-508e-40e7-9af9-9f85dae119b7" providerId="ADAL" clId="{5B748AC7-C77E-493C-A77B-D94156955FEA}" dt="2026-09-01T14:32:41.997" v="1257" actId="571"/>
           <ac:spMkLst>
@@ -393,14 +377,6 @@
             <ac:spMk id="47" creationId="{256E8BA5-967E-5CF1-111F-2B84EA8D9B95}"/>
           </ac:spMkLst>
         </pc:spChg>
-        <pc:spChg chg="del mod">
-          <ac:chgData name="ZUDRELL-KOCH Stefan" userId="e9a6a590-508e-40e7-9af9-9f85dae119b7" providerId="ADAL" clId="{5B748AC7-C77E-493C-A77B-D94156955FEA}" dt="2026-08-27T14:52:51.571" v="386" actId="478"/>
-          <ac:spMkLst>
-            <pc:docMk/>
-            <pc:sldMk cId="1526945579" sldId="256"/>
-            <ac:spMk id="48" creationId="{B766E283-B80B-74F2-866F-8DAC22523B09}"/>
-          </ac:spMkLst>
-        </pc:spChg>
         <pc:spChg chg="add mod">
           <ac:chgData name="ZUDRELL-KOCH Stefan" userId="e9a6a590-508e-40e7-9af9-9f85dae119b7" providerId="ADAL" clId="{5B748AC7-C77E-493C-A77B-D94156955FEA}" dt="2026-09-01T14:33:02.067" v="1260" actId="1076"/>
           <ac:spMkLst>
@@ -417,14 +393,6 @@
             <ac:spMk id="49" creationId="{18A8CD56-8E61-3891-D9FA-BAAB8CACEAAE}"/>
           </ac:spMkLst>
         </pc:spChg>
-        <pc:spChg chg="del mod">
-          <ac:chgData name="ZUDRELL-KOCH Stefan" userId="e9a6a590-508e-40e7-9af9-9f85dae119b7" providerId="ADAL" clId="{5B748AC7-C77E-493C-A77B-D94156955FEA}" dt="2026-09-01T10:00:04.888" v="1106" actId="478"/>
-          <ac:spMkLst>
-            <pc:docMk/>
-            <pc:sldMk cId="1526945579" sldId="256"/>
-            <ac:spMk id="49" creationId="{8D0CB963-DFB4-1B92-5FF5-95DBF3C839D6}"/>
-          </ac:spMkLst>
-        </pc:spChg>
         <pc:spChg chg="mod">
           <ac:chgData name="ZUDRELL-KOCH Stefan" userId="e9a6a590-508e-40e7-9af9-9f85dae119b7" providerId="ADAL" clId="{5B748AC7-C77E-493C-A77B-D94156955FEA}" dt="2026-09-01T14:34:11.423" v="1285" actId="20577"/>
           <ac:spMkLst>
@@ -441,14 +409,6 @@
             <ac:spMk id="52" creationId="{5A7039C9-0882-605A-B4AE-EB6DFC2358E1}"/>
           </ac:spMkLst>
         </pc:spChg>
-        <pc:spChg chg="del mod">
-          <ac:chgData name="ZUDRELL-KOCH Stefan" userId="e9a6a590-508e-40e7-9af9-9f85dae119b7" providerId="ADAL" clId="{5B748AC7-C77E-493C-A77B-D94156955FEA}" dt="2026-08-27T14:53:08.456" v="390" actId="478"/>
-          <ac:spMkLst>
-            <pc:docMk/>
-            <pc:sldMk cId="1526945579" sldId="256"/>
-            <ac:spMk id="55" creationId="{767D7E9F-9A7B-A11B-8CCB-F2781EEE00F7}"/>
-          </ac:spMkLst>
-        </pc:spChg>
         <pc:spChg chg="mod">
           <ac:chgData name="ZUDRELL-KOCH Stefan" userId="e9a6a590-508e-40e7-9af9-9f85dae119b7" providerId="ADAL" clId="{5B748AC7-C77E-493C-A77B-D94156955FEA}" dt="2026-09-01T14:34:09.326" v="1284" actId="1076"/>
           <ac:spMkLst>
@@ -465,30 +425,6 @@
             <ac:spMk id="63" creationId="{E27808B4-A783-F139-E62C-7B95E27EA287}"/>
           </ac:spMkLst>
         </pc:spChg>
-        <pc:spChg chg="del mod">
-          <ac:chgData name="ZUDRELL-KOCH Stefan" userId="e9a6a590-508e-40e7-9af9-9f85dae119b7" providerId="ADAL" clId="{5B748AC7-C77E-493C-A77B-D94156955FEA}" dt="2026-09-01T09:58:03.064" v="1056" actId="478"/>
-          <ac:spMkLst>
-            <pc:docMk/>
-            <pc:sldMk cId="1526945579" sldId="256"/>
-            <ac:spMk id="64" creationId="{167EAB59-4F2B-8C91-D6CF-5BC86DD1DCAC}"/>
-          </ac:spMkLst>
-        </pc:spChg>
-        <pc:spChg chg="del mod">
-          <ac:chgData name="ZUDRELL-KOCH Stefan" userId="e9a6a590-508e-40e7-9af9-9f85dae119b7" providerId="ADAL" clId="{5B748AC7-C77E-493C-A77B-D94156955FEA}" dt="2026-09-01T09:58:05.393" v="1057" actId="478"/>
-          <ac:spMkLst>
-            <pc:docMk/>
-            <pc:sldMk cId="1526945579" sldId="256"/>
-            <ac:spMk id="65" creationId="{26AC6292-684D-C66B-876B-F90B4CDF3C05}"/>
-          </ac:spMkLst>
-        </pc:spChg>
-        <pc:spChg chg="del mod">
-          <ac:chgData name="ZUDRELL-KOCH Stefan" userId="e9a6a590-508e-40e7-9af9-9f85dae119b7" providerId="ADAL" clId="{5B748AC7-C77E-493C-A77B-D94156955FEA}" dt="2026-08-27T14:53:08.456" v="390" actId="478"/>
-          <ac:spMkLst>
-            <pc:docMk/>
-            <pc:sldMk cId="1526945579" sldId="256"/>
-            <ac:spMk id="66" creationId="{067A1D9C-7426-D9E3-0CE9-50882FDBA0D7}"/>
-          </ac:spMkLst>
-        </pc:spChg>
         <pc:spChg chg="add mod">
           <ac:chgData name="ZUDRELL-KOCH Stefan" userId="e9a6a590-508e-40e7-9af9-9f85dae119b7" providerId="ADAL" clId="{5B748AC7-C77E-493C-A77B-D94156955FEA}" dt="2026-09-01T14:33:53.066" v="1272" actId="571"/>
           <ac:spMkLst>
@@ -505,68 +441,12 @@
             <ac:spMk id="67" creationId="{1854BEED-1958-F1F5-1703-EEA8EC686C1C}"/>
           </ac:spMkLst>
         </pc:spChg>
-        <pc:spChg chg="del mod">
-          <ac:chgData name="ZUDRELL-KOCH Stefan" userId="e9a6a590-508e-40e7-9af9-9f85dae119b7" providerId="ADAL" clId="{5B748AC7-C77E-493C-A77B-D94156955FEA}" dt="2026-08-27T14:53:02.348" v="389" actId="478"/>
-          <ac:spMkLst>
-            <pc:docMk/>
-            <pc:sldMk cId="1526945579" sldId="256"/>
-            <ac:spMk id="67" creationId="{F06E2BDB-BA20-9261-2458-1EF537F7B142}"/>
-          </ac:spMkLst>
-        </pc:spChg>
-        <pc:spChg chg="del mod">
-          <ac:chgData name="ZUDRELL-KOCH Stefan" userId="e9a6a590-508e-40e7-9af9-9f85dae119b7" providerId="ADAL" clId="{5B748AC7-C77E-493C-A77B-D94156955FEA}" dt="2026-08-27T14:53:08.456" v="390" actId="478"/>
-          <ac:spMkLst>
-            <pc:docMk/>
-            <pc:sldMk cId="1526945579" sldId="256"/>
-            <ac:spMk id="68" creationId="{EDB9569E-D413-78B6-876D-BE4426DFA37F}"/>
-          </ac:spMkLst>
-        </pc:spChg>
         <pc:spChg chg="mod">
           <ac:chgData name="ZUDRELL-KOCH Stefan" userId="e9a6a590-508e-40e7-9af9-9f85dae119b7" providerId="ADAL" clId="{5B748AC7-C77E-493C-A77B-D94156955FEA}" dt="2026-09-01T09:38:49.033" v="577" actId="20577"/>
           <ac:spMkLst>
             <pc:docMk/>
             <pc:sldMk cId="1526945579" sldId="256"/>
             <ac:spMk id="73" creationId="{4FEC6D4C-92F4-E406-915F-5437EA3B674A}"/>
-          </ac:spMkLst>
-        </pc:spChg>
-        <pc:spChg chg="del mod">
-          <ac:chgData name="ZUDRELL-KOCH Stefan" userId="e9a6a590-508e-40e7-9af9-9f85dae119b7" providerId="ADAL" clId="{5B748AC7-C77E-493C-A77B-D94156955FEA}" dt="2026-09-01T09:58:05.393" v="1057" actId="478"/>
-          <ac:spMkLst>
-            <pc:docMk/>
-            <pc:sldMk cId="1526945579" sldId="256"/>
-            <ac:spMk id="74" creationId="{58A702B1-4660-18BA-CFDC-8DC5D5ADC844}"/>
-          </ac:spMkLst>
-        </pc:spChg>
-        <pc:spChg chg="del mod">
-          <ac:chgData name="ZUDRELL-KOCH Stefan" userId="e9a6a590-508e-40e7-9af9-9f85dae119b7" providerId="ADAL" clId="{5B748AC7-C77E-493C-A77B-D94156955FEA}" dt="2026-09-01T09:58:10.871" v="1059" actId="478"/>
-          <ac:spMkLst>
-            <pc:docMk/>
-            <pc:sldMk cId="1526945579" sldId="256"/>
-            <ac:spMk id="75" creationId="{88C42338-6392-F02B-3AD0-B691DB9F1A41}"/>
-          </ac:spMkLst>
-        </pc:spChg>
-        <pc:spChg chg="del mod">
-          <ac:chgData name="ZUDRELL-KOCH Stefan" userId="e9a6a590-508e-40e7-9af9-9f85dae119b7" providerId="ADAL" clId="{5B748AC7-C77E-493C-A77B-D94156955FEA}" dt="2026-09-01T09:58:10.871" v="1059" actId="478"/>
-          <ac:spMkLst>
-            <pc:docMk/>
-            <pc:sldMk cId="1526945579" sldId="256"/>
-            <ac:spMk id="76" creationId="{E7DD2BF3-8E86-0E57-EA8E-078C735A47D8}"/>
-          </ac:spMkLst>
-        </pc:spChg>
-        <pc:spChg chg="del mod">
-          <ac:chgData name="ZUDRELL-KOCH Stefan" userId="e9a6a590-508e-40e7-9af9-9f85dae119b7" providerId="ADAL" clId="{5B748AC7-C77E-493C-A77B-D94156955FEA}" dt="2026-08-27T14:39:08.128" v="282" actId="478"/>
-          <ac:spMkLst>
-            <pc:docMk/>
-            <pc:sldMk cId="1526945579" sldId="256"/>
-            <ac:spMk id="91" creationId="{CEDC11C3-0E43-75CA-270B-B1DB8CE2BD06}"/>
-          </ac:spMkLst>
-        </pc:spChg>
-        <pc:spChg chg="del mod">
-          <ac:chgData name="ZUDRELL-KOCH Stefan" userId="e9a6a590-508e-40e7-9af9-9f85dae119b7" providerId="ADAL" clId="{5B748AC7-C77E-493C-A77B-D94156955FEA}" dt="2026-09-01T09:58:05.393" v="1057" actId="478"/>
-          <ac:spMkLst>
-            <pc:docMk/>
-            <pc:sldMk cId="1526945579" sldId="256"/>
-            <ac:spMk id="93" creationId="{869BA8CE-B6F5-9895-A48A-FA837E0D0F73}"/>
           </ac:spMkLst>
         </pc:spChg>
         <pc:spChg chg="add mod">
@@ -577,36 +457,12 @@
             <ac:spMk id="97" creationId="{8A900230-7247-E5BD-C099-BD1C02E8D36F}"/>
           </ac:spMkLst>
         </pc:spChg>
-        <pc:spChg chg="del mod">
-          <ac:chgData name="ZUDRELL-KOCH Stefan" userId="e9a6a590-508e-40e7-9af9-9f85dae119b7" providerId="ADAL" clId="{5B748AC7-C77E-493C-A77B-D94156955FEA}" dt="2026-09-01T09:58:05.393" v="1057" actId="478"/>
-          <ac:spMkLst>
-            <pc:docMk/>
-            <pc:sldMk cId="1526945579" sldId="256"/>
-            <ac:spMk id="98" creationId="{152C7812-4B19-E54B-F060-63548D481FB8}"/>
-          </ac:spMkLst>
-        </pc:spChg>
-        <pc:spChg chg="del mod">
-          <ac:chgData name="ZUDRELL-KOCH Stefan" userId="e9a6a590-508e-40e7-9af9-9f85dae119b7" providerId="ADAL" clId="{5B748AC7-C77E-493C-A77B-D94156955FEA}" dt="2026-08-27T14:53:08.456" v="390" actId="478"/>
-          <ac:spMkLst>
-            <pc:docMk/>
-            <pc:sldMk cId="1526945579" sldId="256"/>
-            <ac:spMk id="99" creationId="{FB86073F-EBA0-634A-CF81-1DE4F06C4875}"/>
-          </ac:spMkLst>
-        </pc:spChg>
         <pc:spChg chg="add mod">
           <ac:chgData name="ZUDRELL-KOCH Stefan" userId="e9a6a590-508e-40e7-9af9-9f85dae119b7" providerId="ADAL" clId="{5B748AC7-C77E-493C-A77B-D94156955FEA}" dt="2026-09-01T09:26:27.230" v="484" actId="1076"/>
           <ac:spMkLst>
             <pc:docMk/>
             <pc:sldMk cId="1526945579" sldId="256"/>
             <ac:spMk id="100" creationId="{7A1B9A3D-2BAA-A98C-1048-B0FD03F021FC}"/>
-          </ac:spMkLst>
-        </pc:spChg>
-        <pc:spChg chg="del mod">
-          <ac:chgData name="ZUDRELL-KOCH Stefan" userId="e9a6a590-508e-40e7-9af9-9f85dae119b7" providerId="ADAL" clId="{5B748AC7-C77E-493C-A77B-D94156955FEA}" dt="2026-09-01T09:58:05.393" v="1057" actId="478"/>
-          <ac:spMkLst>
-            <pc:docMk/>
-            <pc:sldMk cId="1526945579" sldId="256"/>
-            <ac:spMk id="101" creationId="{BDD005FE-FEF2-8673-D974-3CB4F2A8CEB2}"/>
           </ac:spMkLst>
         </pc:spChg>
         <pc:spChg chg="mod">
@@ -681,180 +537,12 @@
             <ac:spMk id="114" creationId="{F9068A31-788B-1594-69A9-4B1E926924F9}"/>
           </ac:spMkLst>
         </pc:spChg>
-        <pc:spChg chg="del">
-          <ac:chgData name="ZUDRELL-KOCH Stefan" userId="e9a6a590-508e-40e7-9af9-9f85dae119b7" providerId="ADAL" clId="{5B748AC7-C77E-493C-A77B-D94156955FEA}" dt="2026-08-27T13:42:24.383" v="29" actId="478"/>
-          <ac:spMkLst>
-            <pc:docMk/>
-            <pc:sldMk cId="1526945579" sldId="256"/>
-            <ac:spMk id="115" creationId="{B4AA7F59-D9C8-E942-4180-064BC61CB80F}"/>
-          </ac:spMkLst>
-        </pc:spChg>
-        <pc:spChg chg="del">
-          <ac:chgData name="ZUDRELL-KOCH Stefan" userId="e9a6a590-508e-40e7-9af9-9f85dae119b7" providerId="ADAL" clId="{5B748AC7-C77E-493C-A77B-D94156955FEA}" dt="2026-08-27T13:42:24.383" v="29" actId="478"/>
-          <ac:spMkLst>
-            <pc:docMk/>
-            <pc:sldMk cId="1526945579" sldId="256"/>
-            <ac:spMk id="117" creationId="{653371E0-0C62-65B3-D577-499B916A9624}"/>
-          </ac:spMkLst>
-        </pc:spChg>
         <pc:spChg chg="mod">
           <ac:chgData name="ZUDRELL-KOCH Stefan" userId="e9a6a590-508e-40e7-9af9-9f85dae119b7" providerId="ADAL" clId="{5B748AC7-C77E-493C-A77B-D94156955FEA}" dt="2026-09-01T14:30:09.586" v="1225" actId="20577"/>
           <ac:spMkLst>
             <pc:docMk/>
             <pc:sldMk cId="1526945579" sldId="256"/>
             <ac:spMk id="118" creationId="{982007E9-2386-DC87-5A01-1A5A5D347C2C}"/>
-          </ac:spMkLst>
-        </pc:spChg>
-        <pc:spChg chg="del">
-          <ac:chgData name="ZUDRELL-KOCH Stefan" userId="e9a6a590-508e-40e7-9af9-9f85dae119b7" providerId="ADAL" clId="{5B748AC7-C77E-493C-A77B-D94156955FEA}" dt="2026-08-27T13:42:19.666" v="28" actId="478"/>
-          <ac:spMkLst>
-            <pc:docMk/>
-            <pc:sldMk cId="1526945579" sldId="256"/>
-            <ac:spMk id="119" creationId="{25799F16-5077-778D-F4CB-2FE35C7199E0}"/>
-          </ac:spMkLst>
-        </pc:spChg>
-        <pc:spChg chg="del">
-          <ac:chgData name="ZUDRELL-KOCH Stefan" userId="e9a6a590-508e-40e7-9af9-9f85dae119b7" providerId="ADAL" clId="{5B748AC7-C77E-493C-A77B-D94156955FEA}" dt="2026-08-27T13:42:13.246" v="27" actId="478"/>
-          <ac:spMkLst>
-            <pc:docMk/>
-            <pc:sldMk cId="1526945579" sldId="256"/>
-            <ac:spMk id="120" creationId="{56D63384-5B55-9829-FF3C-49C736FF6206}"/>
-          </ac:spMkLst>
-        </pc:spChg>
-        <pc:spChg chg="del">
-          <ac:chgData name="ZUDRELL-KOCH Stefan" userId="e9a6a590-508e-40e7-9af9-9f85dae119b7" providerId="ADAL" clId="{5B748AC7-C77E-493C-A77B-D94156955FEA}" dt="2026-08-27T13:42:13.246" v="27" actId="478"/>
-          <ac:spMkLst>
-            <pc:docMk/>
-            <pc:sldMk cId="1526945579" sldId="256"/>
-            <ac:spMk id="121" creationId="{C001FFCB-B44E-8F83-B317-0EEF632963A2}"/>
-          </ac:spMkLst>
-        </pc:spChg>
-        <pc:spChg chg="add del mod">
-          <ac:chgData name="ZUDRELL-KOCH Stefan" userId="e9a6a590-508e-40e7-9af9-9f85dae119b7" providerId="ADAL" clId="{5B748AC7-C77E-493C-A77B-D94156955FEA}" dt="2026-09-01T09:58:05.393" v="1057" actId="478"/>
-          <ac:spMkLst>
-            <pc:docMk/>
-            <pc:sldMk cId="1526945579" sldId="256"/>
-            <ac:spMk id="124" creationId="{879D02F1-1741-88D5-6D01-7BD6ED6A2B20}"/>
-          </ac:spMkLst>
-        </pc:spChg>
-        <pc:spChg chg="del mod">
-          <ac:chgData name="ZUDRELL-KOCH Stefan" userId="e9a6a590-508e-40e7-9af9-9f85dae119b7" providerId="ADAL" clId="{5B748AC7-C77E-493C-A77B-D94156955FEA}" dt="2026-09-01T09:58:07.388" v="1058" actId="478"/>
-          <ac:spMkLst>
-            <pc:docMk/>
-            <pc:sldMk cId="1526945579" sldId="256"/>
-            <ac:spMk id="130" creationId="{EA0BF51B-D117-768C-7906-3108647B201C}"/>
-          </ac:spMkLst>
-        </pc:spChg>
-        <pc:spChg chg="del mod">
-          <ac:chgData name="ZUDRELL-KOCH Stefan" userId="e9a6a590-508e-40e7-9af9-9f85dae119b7" providerId="ADAL" clId="{5B748AC7-C77E-493C-A77B-D94156955FEA}" dt="2026-09-01T09:59:11.261" v="1080" actId="478"/>
-          <ac:spMkLst>
-            <pc:docMk/>
-            <pc:sldMk cId="1526945579" sldId="256"/>
-            <ac:spMk id="131" creationId="{58C9E0E3-D97A-01AC-D367-B59D0357DE97}"/>
-          </ac:spMkLst>
-        </pc:spChg>
-        <pc:spChg chg="del mod">
-          <ac:chgData name="ZUDRELL-KOCH Stefan" userId="e9a6a590-508e-40e7-9af9-9f85dae119b7" providerId="ADAL" clId="{5B748AC7-C77E-493C-A77B-D94156955FEA}" dt="2026-09-01T09:58:03.064" v="1056" actId="478"/>
-          <ac:spMkLst>
-            <pc:docMk/>
-            <pc:sldMk cId="1526945579" sldId="256"/>
-            <ac:spMk id="132" creationId="{EDF32F30-C5C2-7444-3D34-E42A35432653}"/>
-          </ac:spMkLst>
-        </pc:spChg>
-        <pc:spChg chg="del mod">
-          <ac:chgData name="ZUDRELL-KOCH Stefan" userId="e9a6a590-508e-40e7-9af9-9f85dae119b7" providerId="ADAL" clId="{5B748AC7-C77E-493C-A77B-D94156955FEA}" dt="2026-08-27T14:39:08.128" v="282" actId="478"/>
-          <ac:spMkLst>
-            <pc:docMk/>
-            <pc:sldMk cId="1526945579" sldId="256"/>
-            <ac:spMk id="140" creationId="{6311B47F-61FA-3313-B52C-9D34A5431680}"/>
-          </ac:spMkLst>
-        </pc:spChg>
-        <pc:spChg chg="del mod">
-          <ac:chgData name="ZUDRELL-KOCH Stefan" userId="e9a6a590-508e-40e7-9af9-9f85dae119b7" providerId="ADAL" clId="{5B748AC7-C77E-493C-A77B-D94156955FEA}" dt="2026-08-27T14:39:08.128" v="282" actId="478"/>
-          <ac:spMkLst>
-            <pc:docMk/>
-            <pc:sldMk cId="1526945579" sldId="256"/>
-            <ac:spMk id="145" creationId="{D10B23A5-6174-BFC9-7C10-128FF65B6933}"/>
-          </ac:spMkLst>
-        </pc:spChg>
-        <pc:spChg chg="del mod">
-          <ac:chgData name="ZUDRELL-KOCH Stefan" userId="e9a6a590-508e-40e7-9af9-9f85dae119b7" providerId="ADAL" clId="{5B748AC7-C77E-493C-A77B-D94156955FEA}" dt="2026-09-01T14:30:45.636" v="1237" actId="478"/>
-          <ac:spMkLst>
-            <pc:docMk/>
-            <pc:sldMk cId="1526945579" sldId="256"/>
-            <ac:spMk id="147" creationId="{79D8DC6E-7FFB-0B85-4919-8D669E8F4A78}"/>
-          </ac:spMkLst>
-        </pc:spChg>
-        <pc:spChg chg="del mod">
-          <ac:chgData name="ZUDRELL-KOCH Stefan" userId="e9a6a590-508e-40e7-9af9-9f85dae119b7" providerId="ADAL" clId="{5B748AC7-C77E-493C-A77B-D94156955FEA}" dt="2026-09-01T09:58:10.871" v="1059" actId="478"/>
-          <ac:spMkLst>
-            <pc:docMk/>
-            <pc:sldMk cId="1526945579" sldId="256"/>
-            <ac:spMk id="149" creationId="{89032E49-BE16-A8F2-EC2A-086441549CFE}"/>
-          </ac:spMkLst>
-        </pc:spChg>
-        <pc:spChg chg="del mod">
-          <ac:chgData name="ZUDRELL-KOCH Stefan" userId="e9a6a590-508e-40e7-9af9-9f85dae119b7" providerId="ADAL" clId="{5B748AC7-C77E-493C-A77B-D94156955FEA}" dt="2026-09-01T09:58:05.393" v="1057" actId="478"/>
-          <ac:spMkLst>
-            <pc:docMk/>
-            <pc:sldMk cId="1526945579" sldId="256"/>
-            <ac:spMk id="150" creationId="{E7071F42-47E0-11B9-AEBC-7CFE920B6917}"/>
-          </ac:spMkLst>
-        </pc:spChg>
-        <pc:spChg chg="del mod">
-          <ac:chgData name="ZUDRELL-KOCH Stefan" userId="e9a6a590-508e-40e7-9af9-9f85dae119b7" providerId="ADAL" clId="{5B748AC7-C77E-493C-A77B-D94156955FEA}" dt="2026-08-27T14:53:08.456" v="390" actId="478"/>
-          <ac:spMkLst>
-            <pc:docMk/>
-            <pc:sldMk cId="1526945579" sldId="256"/>
-            <ac:spMk id="151" creationId="{92554E67-C76D-51D7-2AA2-85A953CA8DFE}"/>
-          </ac:spMkLst>
-        </pc:spChg>
-        <pc:spChg chg="add del mod">
-          <ac:chgData name="ZUDRELL-KOCH Stefan" userId="e9a6a590-508e-40e7-9af9-9f85dae119b7" providerId="ADAL" clId="{5B748AC7-C77E-493C-A77B-D94156955FEA}" dt="2026-09-01T09:58:15.217" v="1060" actId="478"/>
-          <ac:spMkLst>
-            <pc:docMk/>
-            <pc:sldMk cId="1526945579" sldId="256"/>
-            <ac:spMk id="152" creationId="{5DA56D3A-B608-1CE8-275A-29C75D400B02}"/>
-          </ac:spMkLst>
-        </pc:spChg>
-        <pc:spChg chg="add del mod">
-          <ac:chgData name="ZUDRELL-KOCH Stefan" userId="e9a6a590-508e-40e7-9af9-9f85dae119b7" providerId="ADAL" clId="{5B748AC7-C77E-493C-A77B-D94156955FEA}" dt="2026-09-01T09:58:07.388" v="1058" actId="478"/>
-          <ac:spMkLst>
-            <pc:docMk/>
-            <pc:sldMk cId="1526945579" sldId="256"/>
-            <ac:spMk id="155" creationId="{8E545848-9DB5-3BCF-108E-A963839CBECB}"/>
-          </ac:spMkLst>
-        </pc:spChg>
-        <pc:spChg chg="add del mod">
-          <ac:chgData name="ZUDRELL-KOCH Stefan" userId="e9a6a590-508e-40e7-9af9-9f85dae119b7" providerId="ADAL" clId="{5B748AC7-C77E-493C-A77B-D94156955FEA}" dt="2026-09-01T09:58:05.393" v="1057" actId="478"/>
-          <ac:spMkLst>
-            <pc:docMk/>
-            <pc:sldMk cId="1526945579" sldId="256"/>
-            <ac:spMk id="158" creationId="{89A2A4B7-8C79-8A58-0D7C-7FB37454FD9E}"/>
-          </ac:spMkLst>
-        </pc:spChg>
-        <pc:spChg chg="add del mod">
-          <ac:chgData name="ZUDRELL-KOCH Stefan" userId="e9a6a590-508e-40e7-9af9-9f85dae119b7" providerId="ADAL" clId="{5B748AC7-C77E-493C-A77B-D94156955FEA}" dt="2026-09-01T09:59:09.160" v="1079" actId="478"/>
-          <ac:spMkLst>
-            <pc:docMk/>
-            <pc:sldMk cId="1526945579" sldId="256"/>
-            <ac:spMk id="166" creationId="{F858F53C-A506-0826-4A38-25DCA0894535}"/>
-          </ac:spMkLst>
-        </pc:spChg>
-        <pc:spChg chg="add del mod">
-          <ac:chgData name="ZUDRELL-KOCH Stefan" userId="e9a6a590-508e-40e7-9af9-9f85dae119b7" providerId="ADAL" clId="{5B748AC7-C77E-493C-A77B-D94156955FEA}" dt="2026-09-01T09:58:03.064" v="1056" actId="478"/>
-          <ac:spMkLst>
-            <pc:docMk/>
-            <pc:sldMk cId="1526945579" sldId="256"/>
-            <ac:spMk id="172" creationId="{09E98CA2-A3EB-4AB2-1257-FFD242CC2E28}"/>
-          </ac:spMkLst>
-        </pc:spChg>
-        <pc:spChg chg="add del mod">
-          <ac:chgData name="ZUDRELL-KOCH Stefan" userId="e9a6a590-508e-40e7-9af9-9f85dae119b7" providerId="ADAL" clId="{5B748AC7-C77E-493C-A77B-D94156955FEA}" dt="2026-09-01T09:58:07.388" v="1058" actId="478"/>
-          <ac:spMkLst>
-            <pc:docMk/>
-            <pc:sldMk cId="1526945579" sldId="256"/>
-            <ac:spMk id="175" creationId="{19C95BC4-E190-9DAF-FC87-691FEB57C9F5}"/>
           </ac:spMkLst>
         </pc:spChg>
         <pc:spChg chg="add mod">
@@ -937,14 +625,6 @@
             <ac:spMk id="213" creationId="{7B426E90-3803-D075-244A-18BD9C7DA869}"/>
           </ac:spMkLst>
         </pc:spChg>
-        <pc:spChg chg="add del mod">
-          <ac:chgData name="ZUDRELL-KOCH Stefan" userId="e9a6a590-508e-40e7-9af9-9f85dae119b7" providerId="ADAL" clId="{5B748AC7-C77E-493C-A77B-D94156955FEA}" dt="2026-09-01T09:48:38.959" v="845" actId="478"/>
-          <ac:spMkLst>
-            <pc:docMk/>
-            <pc:sldMk cId="1526945579" sldId="256"/>
-            <ac:spMk id="216" creationId="{1E0D25BF-9F82-0C8A-7EA7-6F9075E083E0}"/>
-          </ac:spMkLst>
-        </pc:spChg>
         <pc:spChg chg="add mod">
           <ac:chgData name="ZUDRELL-KOCH Stefan" userId="e9a6a590-508e-40e7-9af9-9f85dae119b7" providerId="ADAL" clId="{5B748AC7-C77E-493C-A77B-D94156955FEA}" dt="2026-09-01T09:40:18.821" v="637" actId="20577"/>
           <ac:spMkLst>
@@ -1033,14 +713,6 @@
             <ac:spMk id="243" creationId="{4EA2D8E1-A6FD-B17F-43BF-7D9474705185}"/>
           </ac:spMkLst>
         </pc:spChg>
-        <pc:spChg chg="add del mod">
-          <ac:chgData name="ZUDRELL-KOCH Stefan" userId="e9a6a590-508e-40e7-9af9-9f85dae119b7" providerId="ADAL" clId="{5B748AC7-C77E-493C-A77B-D94156955FEA}" dt="2026-09-01T09:58:05.393" v="1057" actId="478"/>
-          <ac:spMkLst>
-            <pc:docMk/>
-            <pc:sldMk cId="1526945579" sldId="256"/>
-            <ac:spMk id="244" creationId="{21E938E9-DD54-D7A5-23D1-D2182E1369E3}"/>
-          </ac:spMkLst>
-        </pc:spChg>
         <pc:spChg chg="add mod">
           <ac:chgData name="ZUDRELL-KOCH Stefan" userId="e9a6a590-508e-40e7-9af9-9f85dae119b7" providerId="ADAL" clId="{5B748AC7-C77E-493C-A77B-D94156955FEA}" dt="2026-09-01T09:44:04.945" v="747" actId="20577"/>
           <ac:spMkLst>
@@ -1153,14 +825,6 @@
             <ac:spMk id="304" creationId="{92C8F824-3827-2C47-C47F-BA7A930C884D}"/>
           </ac:spMkLst>
         </pc:spChg>
-        <pc:spChg chg="add del mod">
-          <ac:chgData name="ZUDRELL-KOCH Stefan" userId="e9a6a590-508e-40e7-9af9-9f85dae119b7" providerId="ADAL" clId="{5B748AC7-C77E-493C-A77B-D94156955FEA}" dt="2026-09-01T09:55:54.628" v="1014" actId="478"/>
-          <ac:spMkLst>
-            <pc:docMk/>
-            <pc:sldMk cId="1526945579" sldId="256"/>
-            <ac:spMk id="327" creationId="{0EDCB489-6DC2-BD23-76C9-89825DB0C589}"/>
-          </ac:spMkLst>
-        </pc:spChg>
         <pc:spChg chg="add mod">
           <ac:chgData name="ZUDRELL-KOCH Stefan" userId="e9a6a590-508e-40e7-9af9-9f85dae119b7" providerId="ADAL" clId="{5B748AC7-C77E-493C-A77B-D94156955FEA}" dt="2026-09-01T14:27:16.992" v="1165" actId="1076"/>
           <ac:spMkLst>
@@ -1225,14 +889,6 @@
             <ac:grpSpMk id="5" creationId="{A12BD6AB-6A60-4081-62BB-E20733D9B39A}"/>
           </ac:grpSpMkLst>
         </pc:grpChg>
-        <pc:grpChg chg="del mod">
-          <ac:chgData name="ZUDRELL-KOCH Stefan" userId="e9a6a590-508e-40e7-9af9-9f85dae119b7" providerId="ADAL" clId="{5B748AC7-C77E-493C-A77B-D94156955FEA}" dt="2026-09-01T09:58:03.064" v="1056" actId="478"/>
-          <ac:grpSpMkLst>
-            <pc:docMk/>
-            <pc:sldMk cId="1526945579" sldId="256"/>
-            <ac:grpSpMk id="6" creationId="{199F05AA-9B53-DFD3-75DB-B598D0BB3197}"/>
-          </ac:grpSpMkLst>
-        </pc:grpChg>
         <pc:grpChg chg="add mod">
           <ac:chgData name="ZUDRELL-KOCH Stefan" userId="e9a6a590-508e-40e7-9af9-9f85dae119b7" providerId="ADAL" clId="{5B748AC7-C77E-493C-A77B-D94156955FEA}" dt="2026-09-01T14:29:40.459" v="1209" actId="571"/>
           <ac:grpSpMkLst>
@@ -1265,30 +921,6 @@
             <ac:grpSpMk id="55" creationId="{5452D8EF-E29A-B367-243B-4E33B7184254}"/>
           </ac:grpSpMkLst>
         </pc:grpChg>
-        <pc:grpChg chg="del mod">
-          <ac:chgData name="ZUDRELL-KOCH Stefan" userId="e9a6a590-508e-40e7-9af9-9f85dae119b7" providerId="ADAL" clId="{5B748AC7-C77E-493C-A77B-D94156955FEA}" dt="2026-09-01T09:58:05.393" v="1057" actId="478"/>
-          <ac:grpSpMkLst>
-            <pc:docMk/>
-            <pc:sldMk cId="1526945579" sldId="256"/>
-            <ac:grpSpMk id="58" creationId="{88219BF4-F1CD-FD59-BEF9-5D3A9E077DBB}"/>
-          </ac:grpSpMkLst>
-        </pc:grpChg>
-        <pc:grpChg chg="del mod">
-          <ac:chgData name="ZUDRELL-KOCH Stefan" userId="e9a6a590-508e-40e7-9af9-9f85dae119b7" providerId="ADAL" clId="{5B748AC7-C77E-493C-A77B-D94156955FEA}" dt="2026-08-27T14:39:08.128" v="282" actId="478"/>
-          <ac:grpSpMkLst>
-            <pc:docMk/>
-            <pc:sldMk cId="1526945579" sldId="256"/>
-            <ac:grpSpMk id="63" creationId="{9C840228-2CBA-CFB0-6AE5-7300A0D6252B}"/>
-          </ac:grpSpMkLst>
-        </pc:grpChg>
-        <pc:grpChg chg="del mod">
-          <ac:chgData name="ZUDRELL-KOCH Stefan" userId="e9a6a590-508e-40e7-9af9-9f85dae119b7" providerId="ADAL" clId="{5B748AC7-C77E-493C-A77B-D94156955FEA}" dt="2026-08-27T14:39:08.128" v="282" actId="478"/>
-          <ac:grpSpMkLst>
-            <pc:docMk/>
-            <pc:sldMk cId="1526945579" sldId="256"/>
-            <ac:grpSpMk id="79" creationId="{E06F2DA9-1DBE-8092-98EF-9B824A0D2A23}"/>
-          </ac:grpSpMkLst>
-        </pc:grpChg>
         <pc:grpChg chg="add mod">
           <ac:chgData name="ZUDRELL-KOCH Stefan" userId="e9a6a590-508e-40e7-9af9-9f85dae119b7" providerId="ADAL" clId="{5B748AC7-C77E-493C-A77B-D94156955FEA}" dt="2026-09-01T09:27:43.060" v="504" actId="1076"/>
           <ac:grpSpMkLst>
@@ -1321,22 +953,6 @@
             <ac:grpSpMk id="232" creationId="{C6CFCF7E-746A-D3DE-9FD1-0C5F92BB3993}"/>
           </ac:grpSpMkLst>
         </pc:grpChg>
-        <pc:cxnChg chg="del mod">
-          <ac:chgData name="ZUDRELL-KOCH Stefan" userId="e9a6a590-508e-40e7-9af9-9f85dae119b7" providerId="ADAL" clId="{5B748AC7-C77E-493C-A77B-D94156955FEA}" dt="2026-09-01T09:58:05.393" v="1057" actId="478"/>
-          <ac:cxnSpMkLst>
-            <pc:docMk/>
-            <pc:sldMk cId="1526945579" sldId="256"/>
-            <ac:cxnSpMk id="2" creationId="{34EEA237-70E8-AEE5-CA7B-DDAA0B750AF8}"/>
-          </ac:cxnSpMkLst>
-        </pc:cxnChg>
-        <pc:cxnChg chg="add del mod">
-          <ac:chgData name="ZUDRELL-KOCH Stefan" userId="e9a6a590-508e-40e7-9af9-9f85dae119b7" providerId="ADAL" clId="{5B748AC7-C77E-493C-A77B-D94156955FEA}" dt="2026-09-01T09:58:15.217" v="1060" actId="478"/>
-          <ac:cxnSpMkLst>
-            <pc:docMk/>
-            <pc:sldMk cId="1526945579" sldId="256"/>
-            <ac:cxnSpMk id="3" creationId="{4B06F788-CFA8-B7A8-0D84-20B08E0C483B}"/>
-          </ac:cxnSpMkLst>
-        </pc:cxnChg>
         <pc:cxnChg chg="mod">
           <ac:chgData name="ZUDRELL-KOCH Stefan" userId="e9a6a590-508e-40e7-9af9-9f85dae119b7" providerId="ADAL" clId="{5B748AC7-C77E-493C-A77B-D94156955FEA}" dt="2026-09-01T14:29:36.407" v="1207"/>
           <ac:cxnSpMkLst>
@@ -1385,36 +1001,12 @@
             <ac:cxnSpMk id="13" creationId="{1840F5DB-0453-CE2B-C7D3-36733463F8C0}"/>
           </ac:cxnSpMkLst>
         </pc:cxnChg>
-        <pc:cxnChg chg="del mod">
-          <ac:chgData name="ZUDRELL-KOCH Stefan" userId="e9a6a590-508e-40e7-9af9-9f85dae119b7" providerId="ADAL" clId="{5B748AC7-C77E-493C-A77B-D94156955FEA}" dt="2026-09-01T09:58:03.064" v="1056" actId="478"/>
-          <ac:cxnSpMkLst>
-            <pc:docMk/>
-            <pc:sldMk cId="1526945579" sldId="256"/>
-            <ac:cxnSpMk id="13" creationId="{20B1B054-B3D6-A1A5-D9D7-1DFDECD40805}"/>
-          </ac:cxnSpMkLst>
-        </pc:cxnChg>
-        <pc:cxnChg chg="del mod">
-          <ac:chgData name="ZUDRELL-KOCH Stefan" userId="e9a6a590-508e-40e7-9af9-9f85dae119b7" providerId="ADAL" clId="{5B748AC7-C77E-493C-A77B-D94156955FEA}" dt="2026-09-01T09:58:07.388" v="1058" actId="478"/>
-          <ac:cxnSpMkLst>
-            <pc:docMk/>
-            <pc:sldMk cId="1526945579" sldId="256"/>
-            <ac:cxnSpMk id="15" creationId="{D1409DD5-FDC9-F0CD-ECF9-332417C3E034}"/>
-          </ac:cxnSpMkLst>
-        </pc:cxnChg>
         <pc:cxnChg chg="mod">
           <ac:chgData name="ZUDRELL-KOCH Stefan" userId="e9a6a590-508e-40e7-9af9-9f85dae119b7" providerId="ADAL" clId="{5B748AC7-C77E-493C-A77B-D94156955FEA}" dt="2026-09-01T14:29:40.459" v="1209" actId="571"/>
           <ac:cxnSpMkLst>
             <pc:docMk/>
             <pc:sldMk cId="1526945579" sldId="256"/>
             <ac:cxnSpMk id="18" creationId="{4BAAB94B-D098-F78E-92BB-D4F404E3435F}"/>
-          </ac:cxnSpMkLst>
-        </pc:cxnChg>
-        <pc:cxnChg chg="del mod">
-          <ac:chgData name="ZUDRELL-KOCH Stefan" userId="e9a6a590-508e-40e7-9af9-9f85dae119b7" providerId="ADAL" clId="{5B748AC7-C77E-493C-A77B-D94156955FEA}" dt="2026-08-27T14:53:08.456" v="390" actId="478"/>
-          <ac:cxnSpMkLst>
-            <pc:docMk/>
-            <pc:sldMk cId="1526945579" sldId="256"/>
-            <ac:cxnSpMk id="18" creationId="{E6753B39-5BA5-0BA9-0940-5F23BBE2E256}"/>
           </ac:cxnSpMkLst>
         </pc:cxnChg>
         <pc:cxnChg chg="mod">
@@ -1449,52 +1041,12 @@
             <ac:cxnSpMk id="25" creationId="{4F3243D6-6C1C-6ED1-594F-C4FA6A18A98D}"/>
           </ac:cxnSpMkLst>
         </pc:cxnChg>
-        <pc:cxnChg chg="add del mod">
-          <ac:chgData name="ZUDRELL-KOCH Stefan" userId="e9a6a590-508e-40e7-9af9-9f85dae119b7" providerId="ADAL" clId="{5B748AC7-C77E-493C-A77B-D94156955FEA}" dt="2026-09-01T09:45:45.989" v="773" actId="478"/>
-          <ac:cxnSpMkLst>
-            <pc:docMk/>
-            <pc:sldMk cId="1526945579" sldId="256"/>
-            <ac:cxnSpMk id="25" creationId="{D23BB678-4DE4-9C81-F292-3350FB00A33A}"/>
-          </ac:cxnSpMkLst>
-        </pc:cxnChg>
-        <pc:cxnChg chg="del mod">
-          <ac:chgData name="ZUDRELL-KOCH Stefan" userId="e9a6a590-508e-40e7-9af9-9f85dae119b7" providerId="ADAL" clId="{5B748AC7-C77E-493C-A77B-D94156955FEA}" dt="2026-08-27T14:41:43.130" v="305" actId="478"/>
-          <ac:cxnSpMkLst>
-            <pc:docMk/>
-            <pc:sldMk cId="1526945579" sldId="256"/>
-            <ac:cxnSpMk id="27" creationId="{52FF2577-53A6-80D6-7404-07B1EAC6CC3B}"/>
-          </ac:cxnSpMkLst>
-        </pc:cxnChg>
         <pc:cxnChg chg="mod">
           <ac:chgData name="ZUDRELL-KOCH Stefan" userId="e9a6a590-508e-40e7-9af9-9f85dae119b7" providerId="ADAL" clId="{5B748AC7-C77E-493C-A77B-D94156955FEA}" dt="2026-09-01T14:29:40.459" v="1209" actId="571"/>
           <ac:cxnSpMkLst>
             <pc:docMk/>
             <pc:sldMk cId="1526945579" sldId="256"/>
             <ac:cxnSpMk id="27" creationId="{A961C4C4-0BB3-DBBD-58B3-0CA7F03C0C0A}"/>
-          </ac:cxnSpMkLst>
-        </pc:cxnChg>
-        <pc:cxnChg chg="del mod">
-          <ac:chgData name="ZUDRELL-KOCH Stefan" userId="e9a6a590-508e-40e7-9af9-9f85dae119b7" providerId="ADAL" clId="{5B748AC7-C77E-493C-A77B-D94156955FEA}" dt="2026-08-27T14:39:08.128" v="282" actId="478"/>
-          <ac:cxnSpMkLst>
-            <pc:docMk/>
-            <pc:sldMk cId="1526945579" sldId="256"/>
-            <ac:cxnSpMk id="28" creationId="{9E1B931D-AE2B-7366-1D1F-6A1EE3486E46}"/>
-          </ac:cxnSpMkLst>
-        </pc:cxnChg>
-        <pc:cxnChg chg="del mod">
-          <ac:chgData name="ZUDRELL-KOCH Stefan" userId="e9a6a590-508e-40e7-9af9-9f85dae119b7" providerId="ADAL" clId="{5B748AC7-C77E-493C-A77B-D94156955FEA}" dt="2026-09-01T09:58:05.393" v="1057" actId="478"/>
-          <ac:cxnSpMkLst>
-            <pc:docMk/>
-            <pc:sldMk cId="1526945579" sldId="256"/>
-            <ac:cxnSpMk id="29" creationId="{DC24A8A6-D5F1-3DF0-DA4F-0E96339C67C5}"/>
-          </ac:cxnSpMkLst>
-        </pc:cxnChg>
-        <pc:cxnChg chg="del mod">
-          <ac:chgData name="ZUDRELL-KOCH Stefan" userId="e9a6a590-508e-40e7-9af9-9f85dae119b7" providerId="ADAL" clId="{5B748AC7-C77E-493C-A77B-D94156955FEA}" dt="2026-09-01T09:58:15.217" v="1060" actId="478"/>
-          <ac:cxnSpMkLst>
-            <pc:docMk/>
-            <pc:sldMk cId="1526945579" sldId="256"/>
-            <ac:cxnSpMk id="37" creationId="{88ABEA16-63EC-489C-A72B-AB17E956A012}"/>
           </ac:cxnSpMkLst>
         </pc:cxnChg>
         <pc:cxnChg chg="add mod">
@@ -1503,22 +1055,6 @@
             <pc:docMk/>
             <pc:sldMk cId="1526945579" sldId="256"/>
             <ac:cxnSpMk id="37" creationId="{977A0B18-E2ED-EC2C-1B43-7595EFBB05CE}"/>
-          </ac:cxnSpMkLst>
-        </pc:cxnChg>
-        <pc:cxnChg chg="del mod">
-          <ac:chgData name="ZUDRELL-KOCH Stefan" userId="e9a6a590-508e-40e7-9af9-9f85dae119b7" providerId="ADAL" clId="{5B748AC7-C77E-493C-A77B-D94156955FEA}" dt="2026-09-01T09:58:05.393" v="1057" actId="478"/>
-          <ac:cxnSpMkLst>
-            <pc:docMk/>
-            <pc:sldMk cId="1526945579" sldId="256"/>
-            <ac:cxnSpMk id="40" creationId="{E2294ACC-CF3D-0514-E60B-3FFD8B56B37E}"/>
-          </ac:cxnSpMkLst>
-        </pc:cxnChg>
-        <pc:cxnChg chg="del mod">
-          <ac:chgData name="ZUDRELL-KOCH Stefan" userId="e9a6a590-508e-40e7-9af9-9f85dae119b7" providerId="ADAL" clId="{5B748AC7-C77E-493C-A77B-D94156955FEA}" dt="2026-08-27T14:52:51.571" v="386" actId="478"/>
-          <ac:cxnSpMkLst>
-            <pc:docMk/>
-            <pc:sldMk cId="1526945579" sldId="256"/>
-            <ac:cxnSpMk id="42" creationId="{DE32586E-413C-9BBD-A5F0-96329E4002E6}"/>
           </ac:cxnSpMkLst>
         </pc:cxnChg>
         <pc:cxnChg chg="mod">
@@ -1537,36 +1073,12 @@
             <ac:cxnSpMk id="44" creationId="{45905C37-1B64-13CF-CBD3-FC107BD0EC8F}"/>
           </ac:cxnSpMkLst>
         </pc:cxnChg>
-        <pc:cxnChg chg="del mod">
-          <ac:chgData name="ZUDRELL-KOCH Stefan" userId="e9a6a590-508e-40e7-9af9-9f85dae119b7" providerId="ADAL" clId="{5B748AC7-C77E-493C-A77B-D94156955FEA}" dt="2026-08-27T14:52:51.571" v="386" actId="478"/>
-          <ac:cxnSpMkLst>
-            <pc:docMk/>
-            <pc:sldMk cId="1526945579" sldId="256"/>
-            <ac:cxnSpMk id="44" creationId="{C6C4B9AB-B6E5-6AB0-B7F5-EE801A07AA1E}"/>
-          </ac:cxnSpMkLst>
-        </pc:cxnChg>
-        <pc:cxnChg chg="del mod">
-          <ac:chgData name="ZUDRELL-KOCH Stefan" userId="e9a6a590-508e-40e7-9af9-9f85dae119b7" providerId="ADAL" clId="{5B748AC7-C77E-493C-A77B-D94156955FEA}" dt="2026-08-27T14:52:51.571" v="386" actId="478"/>
-          <ac:cxnSpMkLst>
-            <pc:docMk/>
-            <pc:sldMk cId="1526945579" sldId="256"/>
-            <ac:cxnSpMk id="47" creationId="{9E0901A8-927A-59CD-335D-A8A49BF049F7}"/>
-          </ac:cxnSpMkLst>
-        </pc:cxnChg>
         <pc:cxnChg chg="mod">
           <ac:chgData name="ZUDRELL-KOCH Stefan" userId="e9a6a590-508e-40e7-9af9-9f85dae119b7" providerId="ADAL" clId="{5B748AC7-C77E-493C-A77B-D94156955FEA}" dt="2026-08-27T14:30:55.124" v="137"/>
           <ac:cxnSpMkLst>
             <pc:docMk/>
             <pc:sldMk cId="1526945579" sldId="256"/>
             <ac:cxnSpMk id="50" creationId="{87C0AADC-F374-3769-8C7F-529289593387}"/>
-          </ac:cxnSpMkLst>
-        </pc:cxnChg>
-        <pc:cxnChg chg="del mod">
-          <ac:chgData name="ZUDRELL-KOCH Stefan" userId="e9a6a590-508e-40e7-9af9-9f85dae119b7" providerId="ADAL" clId="{5B748AC7-C77E-493C-A77B-D94156955FEA}" dt="2026-08-27T14:39:08.128" v="282" actId="478"/>
-          <ac:cxnSpMkLst>
-            <pc:docMk/>
-            <pc:sldMk cId="1526945579" sldId="256"/>
-            <ac:cxnSpMk id="52" creationId="{F5432189-7815-177D-AF9B-8E0F883888EA}"/>
           </ac:cxnSpMkLst>
         </pc:cxnChg>
         <pc:cxnChg chg="mod">
@@ -1657,76 +1169,12 @@
             <ac:cxnSpMk id="71" creationId="{281AA415-1B67-7B27-2D08-BDA1C7207114}"/>
           </ac:cxnSpMkLst>
         </pc:cxnChg>
-        <pc:cxnChg chg="del mod">
-          <ac:chgData name="ZUDRELL-KOCH Stefan" userId="e9a6a590-508e-40e7-9af9-9f85dae119b7" providerId="ADAL" clId="{5B748AC7-C77E-493C-A77B-D94156955FEA}" dt="2026-08-27T14:53:08.456" v="390" actId="478"/>
-          <ac:cxnSpMkLst>
-            <pc:docMk/>
-            <pc:sldMk cId="1526945579" sldId="256"/>
-            <ac:cxnSpMk id="77" creationId="{30294C5A-0ABB-B137-5240-6F372B64BDC9}"/>
-          </ac:cxnSpMkLst>
-        </pc:cxnChg>
-        <pc:cxnChg chg="del mod">
-          <ac:chgData name="ZUDRELL-KOCH Stefan" userId="e9a6a590-508e-40e7-9af9-9f85dae119b7" providerId="ADAL" clId="{5B748AC7-C77E-493C-A77B-D94156955FEA}" dt="2026-09-01T09:58:15.217" v="1060" actId="478"/>
-          <ac:cxnSpMkLst>
-            <pc:docMk/>
-            <pc:sldMk cId="1526945579" sldId="256"/>
-            <ac:cxnSpMk id="80" creationId="{C8E635C8-DCC7-80E8-9F8D-338D1581B79A}"/>
-          </ac:cxnSpMkLst>
-        </pc:cxnChg>
-        <pc:cxnChg chg="del mod">
-          <ac:chgData name="ZUDRELL-KOCH Stefan" userId="e9a6a590-508e-40e7-9af9-9f85dae119b7" providerId="ADAL" clId="{5B748AC7-C77E-493C-A77B-D94156955FEA}" dt="2026-09-01T09:58:05.393" v="1057" actId="478"/>
-          <ac:cxnSpMkLst>
-            <pc:docMk/>
-            <pc:sldMk cId="1526945579" sldId="256"/>
-            <ac:cxnSpMk id="81" creationId="{A1352A71-FD62-BA6B-34CE-13C12683FEB2}"/>
-          </ac:cxnSpMkLst>
-        </pc:cxnChg>
-        <pc:cxnChg chg="del mod">
-          <ac:chgData name="ZUDRELL-KOCH Stefan" userId="e9a6a590-508e-40e7-9af9-9f85dae119b7" providerId="ADAL" clId="{5B748AC7-C77E-493C-A77B-D94156955FEA}" dt="2026-09-01T09:58:05.393" v="1057" actId="478"/>
-          <ac:cxnSpMkLst>
-            <pc:docMk/>
-            <pc:sldMk cId="1526945579" sldId="256"/>
-            <ac:cxnSpMk id="82" creationId="{B2BC92D8-0EFD-D217-372E-116F7B5247F7}"/>
-          </ac:cxnSpMkLst>
-        </pc:cxnChg>
-        <pc:cxnChg chg="del mod">
-          <ac:chgData name="ZUDRELL-KOCH Stefan" userId="e9a6a590-508e-40e7-9af9-9f85dae119b7" providerId="ADAL" clId="{5B748AC7-C77E-493C-A77B-D94156955FEA}" dt="2026-08-27T14:38:51.777" v="280" actId="478"/>
-          <ac:cxnSpMkLst>
-            <pc:docMk/>
-            <pc:sldMk cId="1526945579" sldId="256"/>
-            <ac:cxnSpMk id="85" creationId="{088E2089-DD77-2EFA-DD41-F03F6270831E}"/>
-          </ac:cxnSpMkLst>
-        </pc:cxnChg>
         <pc:cxnChg chg="add mod">
           <ac:chgData name="ZUDRELL-KOCH Stefan" userId="e9a6a590-508e-40e7-9af9-9f85dae119b7" providerId="ADAL" clId="{5B748AC7-C77E-493C-A77B-D94156955FEA}" dt="2026-09-01T09:26:27.230" v="484" actId="1076"/>
           <ac:cxnSpMkLst>
             <pc:docMk/>
             <pc:sldMk cId="1526945579" sldId="256"/>
             <ac:cxnSpMk id="87" creationId="{B251BA3E-7E96-E7B0-BB3F-6BA6DA0BCD70}"/>
-          </ac:cxnSpMkLst>
-        </pc:cxnChg>
-        <pc:cxnChg chg="del mod">
-          <ac:chgData name="ZUDRELL-KOCH Stefan" userId="e9a6a590-508e-40e7-9af9-9f85dae119b7" providerId="ADAL" clId="{5B748AC7-C77E-493C-A77B-D94156955FEA}" dt="2026-09-01T09:58:03.064" v="1056" actId="478"/>
-          <ac:cxnSpMkLst>
-            <pc:docMk/>
-            <pc:sldMk cId="1526945579" sldId="256"/>
-            <ac:cxnSpMk id="88" creationId="{9D16C13F-AC48-F654-D1A5-0492070AC15F}"/>
-          </ac:cxnSpMkLst>
-        </pc:cxnChg>
-        <pc:cxnChg chg="del mod">
-          <ac:chgData name="ZUDRELL-KOCH Stefan" userId="e9a6a590-508e-40e7-9af9-9f85dae119b7" providerId="ADAL" clId="{5B748AC7-C77E-493C-A77B-D94156955FEA}" dt="2026-09-01T09:58:05.393" v="1057" actId="478"/>
-          <ac:cxnSpMkLst>
-            <pc:docMk/>
-            <pc:sldMk cId="1526945579" sldId="256"/>
-            <ac:cxnSpMk id="90" creationId="{D4949E05-AB8D-FE32-05A6-5C5BEBDE6E1B}"/>
-          </ac:cxnSpMkLst>
-        </pc:cxnChg>
-        <pc:cxnChg chg="del mod">
-          <ac:chgData name="ZUDRELL-KOCH Stefan" userId="e9a6a590-508e-40e7-9af9-9f85dae119b7" providerId="ADAL" clId="{5B748AC7-C77E-493C-A77B-D94156955FEA}" dt="2026-09-01T09:58:05.393" v="1057" actId="478"/>
-          <ac:cxnSpMkLst>
-            <pc:docMk/>
-            <pc:sldMk cId="1526945579" sldId="256"/>
-            <ac:cxnSpMk id="92" creationId="{AB4B3377-35B1-C34E-E6E4-8BA13A77F97F}"/>
           </ac:cxnSpMkLst>
         </pc:cxnChg>
         <pc:cxnChg chg="add mod">
@@ -1745,14 +1193,6 @@
             <ac:cxnSpMk id="96" creationId="{F1097DDE-8A25-2643-BC40-5A7C46C510A9}"/>
           </ac:cxnSpMkLst>
         </pc:cxnChg>
-        <pc:cxnChg chg="del mod">
-          <ac:chgData name="ZUDRELL-KOCH Stefan" userId="e9a6a590-508e-40e7-9af9-9f85dae119b7" providerId="ADAL" clId="{5B748AC7-C77E-493C-A77B-D94156955FEA}" dt="2026-08-27T14:39:08.128" v="282" actId="478"/>
-          <ac:cxnSpMkLst>
-            <pc:docMk/>
-            <pc:sldMk cId="1526945579" sldId="256"/>
-            <ac:cxnSpMk id="104" creationId="{29CF32D2-24D4-4EA1-44D0-70244228ED66}"/>
-          </ac:cxnSpMkLst>
-        </pc:cxnChg>
         <pc:cxnChg chg="add mod">
           <ac:chgData name="ZUDRELL-KOCH Stefan" userId="e9a6a590-508e-40e7-9af9-9f85dae119b7" providerId="ADAL" clId="{5B748AC7-C77E-493C-A77B-D94156955FEA}" dt="2026-09-01T09:28:20.732" v="519" actId="1582"/>
           <ac:cxnSpMkLst>
@@ -1769,94 +1209,6 @@
             <ac:cxnSpMk id="123" creationId="{60BE0793-C0EE-A884-8445-EFD227A7C8A9}"/>
           </ac:cxnSpMkLst>
         </pc:cxnChg>
-        <pc:cxnChg chg="del mod">
-          <ac:chgData name="ZUDRELL-KOCH Stefan" userId="e9a6a590-508e-40e7-9af9-9f85dae119b7" providerId="ADAL" clId="{5B748AC7-C77E-493C-A77B-D94156955FEA}" dt="2026-08-27T14:41:46.094" v="306" actId="478"/>
-          <ac:cxnSpMkLst>
-            <pc:docMk/>
-            <pc:sldMk cId="1526945579" sldId="256"/>
-            <ac:cxnSpMk id="134" creationId="{7E33C4BC-E6C2-F6A4-D6C4-1D91134E7FF0}"/>
-          </ac:cxnSpMkLst>
-        </pc:cxnChg>
-        <pc:cxnChg chg="add del mod">
-          <ac:chgData name="ZUDRELL-KOCH Stefan" userId="e9a6a590-508e-40e7-9af9-9f85dae119b7" providerId="ADAL" clId="{5B748AC7-C77E-493C-A77B-D94156955FEA}" dt="2026-08-27T14:37:28.118" v="249" actId="478"/>
-          <ac:cxnSpMkLst>
-            <pc:docMk/>
-            <pc:sldMk cId="1526945579" sldId="256"/>
-            <ac:cxnSpMk id="135" creationId="{F7A4A561-B1A8-A967-06A3-BB402CCE94D6}"/>
-          </ac:cxnSpMkLst>
-        </pc:cxnChg>
-        <pc:cxnChg chg="add del mod">
-          <ac:chgData name="ZUDRELL-KOCH Stefan" userId="e9a6a590-508e-40e7-9af9-9f85dae119b7" providerId="ADAL" clId="{5B748AC7-C77E-493C-A77B-D94156955FEA}" dt="2026-09-01T09:26:29.305" v="485" actId="478"/>
-          <ac:cxnSpMkLst>
-            <pc:docMk/>
-            <pc:sldMk cId="1526945579" sldId="256"/>
-            <ac:cxnSpMk id="138" creationId="{0E8C5501-5B64-A46D-A591-038FE3256B8A}"/>
-          </ac:cxnSpMkLst>
-        </pc:cxnChg>
-        <pc:cxnChg chg="add del mod">
-          <ac:chgData name="ZUDRELL-KOCH Stefan" userId="e9a6a590-508e-40e7-9af9-9f85dae119b7" providerId="ADAL" clId="{5B748AC7-C77E-493C-A77B-D94156955FEA}" dt="2026-09-01T09:40:31.979" v="644" actId="478"/>
-          <ac:cxnSpMkLst>
-            <pc:docMk/>
-            <pc:sldMk cId="1526945579" sldId="256"/>
-            <ac:cxnSpMk id="141" creationId="{7897745E-0714-9C13-E6A4-D01895FAD45B}"/>
-          </ac:cxnSpMkLst>
-        </pc:cxnChg>
-        <pc:cxnChg chg="del mod">
-          <ac:chgData name="ZUDRELL-KOCH Stefan" userId="e9a6a590-508e-40e7-9af9-9f85dae119b7" providerId="ADAL" clId="{5B748AC7-C77E-493C-A77B-D94156955FEA}" dt="2026-08-27T14:39:08.128" v="282" actId="478"/>
-          <ac:cxnSpMkLst>
-            <pc:docMk/>
-            <pc:sldMk cId="1526945579" sldId="256"/>
-            <ac:cxnSpMk id="142" creationId="{721AFC69-B0E8-7C9D-DB76-F150DC5E05A1}"/>
-          </ac:cxnSpMkLst>
-        </pc:cxnChg>
-        <pc:cxnChg chg="add del mod">
-          <ac:chgData name="ZUDRELL-KOCH Stefan" userId="e9a6a590-508e-40e7-9af9-9f85dae119b7" providerId="ADAL" clId="{5B748AC7-C77E-493C-A77B-D94156955FEA}" dt="2026-09-01T09:58:03.064" v="1056" actId="478"/>
-          <ac:cxnSpMkLst>
-            <pc:docMk/>
-            <pc:sldMk cId="1526945579" sldId="256"/>
-            <ac:cxnSpMk id="144" creationId="{8C3426A0-2467-A79E-4E5B-943FED445899}"/>
-          </ac:cxnSpMkLst>
-        </pc:cxnChg>
-        <pc:cxnChg chg="add del mod">
-          <ac:chgData name="ZUDRELL-KOCH Stefan" userId="e9a6a590-508e-40e7-9af9-9f85dae119b7" providerId="ADAL" clId="{5B748AC7-C77E-493C-A77B-D94156955FEA}" dt="2026-09-01T09:26:30.031" v="486" actId="478"/>
-          <ac:cxnSpMkLst>
-            <pc:docMk/>
-            <pc:sldMk cId="1526945579" sldId="256"/>
-            <ac:cxnSpMk id="153" creationId="{44BE747A-7568-DC85-9ABC-0D267E6D57A1}"/>
-          </ac:cxnSpMkLst>
-        </pc:cxnChg>
-        <pc:cxnChg chg="add del mod">
-          <ac:chgData name="ZUDRELL-KOCH Stefan" userId="e9a6a590-508e-40e7-9af9-9f85dae119b7" providerId="ADAL" clId="{5B748AC7-C77E-493C-A77B-D94156955FEA}" dt="2026-09-01T09:58:05.393" v="1057" actId="478"/>
-          <ac:cxnSpMkLst>
-            <pc:docMk/>
-            <pc:sldMk cId="1526945579" sldId="256"/>
-            <ac:cxnSpMk id="160" creationId="{DC0D671C-518A-ED8D-3086-2CB3C72D3C1B}"/>
-          </ac:cxnSpMkLst>
-        </pc:cxnChg>
-        <pc:cxnChg chg="add del mod">
-          <ac:chgData name="ZUDRELL-KOCH Stefan" userId="e9a6a590-508e-40e7-9af9-9f85dae119b7" providerId="ADAL" clId="{5B748AC7-C77E-493C-A77B-D94156955FEA}" dt="2026-09-01T09:59:12.113" v="1081" actId="478"/>
-          <ac:cxnSpMkLst>
-            <pc:docMk/>
-            <pc:sldMk cId="1526945579" sldId="256"/>
-            <ac:cxnSpMk id="161" creationId="{875F1488-BD1D-63FC-94AC-EE719D7B5A7A}"/>
-          </ac:cxnSpMkLst>
-        </pc:cxnChg>
-        <pc:cxnChg chg="add del mod">
-          <ac:chgData name="ZUDRELL-KOCH Stefan" userId="e9a6a590-508e-40e7-9af9-9f85dae119b7" providerId="ADAL" clId="{5B748AC7-C77E-493C-A77B-D94156955FEA}" dt="2026-09-01T09:59:07.531" v="1078" actId="478"/>
-          <ac:cxnSpMkLst>
-            <pc:docMk/>
-            <pc:sldMk cId="1526945579" sldId="256"/>
-            <ac:cxnSpMk id="165" creationId="{B294EB1D-304D-BD48-2DC8-88E47EFF9D74}"/>
-          </ac:cxnSpMkLst>
-        </pc:cxnChg>
-        <pc:cxnChg chg="add del mod">
-          <ac:chgData name="ZUDRELL-KOCH Stefan" userId="e9a6a590-508e-40e7-9af9-9f85dae119b7" providerId="ADAL" clId="{5B748AC7-C77E-493C-A77B-D94156955FEA}" dt="2026-09-01T09:45:45.989" v="773" actId="478"/>
-          <ac:cxnSpMkLst>
-            <pc:docMk/>
-            <pc:sldMk cId="1526945579" sldId="256"/>
-            <ac:cxnSpMk id="173" creationId="{CF5AA766-DD65-BD92-109B-CBB56EC6C270}"/>
-          </ac:cxnSpMkLst>
-        </pc:cxnChg>
         <pc:cxnChg chg="mod">
           <ac:chgData name="ZUDRELL-KOCH Stefan" userId="e9a6a590-508e-40e7-9af9-9f85dae119b7" providerId="ADAL" clId="{5B748AC7-C77E-493C-A77B-D94156955FEA}" dt="2026-09-01T09:26:49.738" v="488"/>
           <ac:cxnSpMkLst>
@@ -1921,14 +1273,6 @@
             <ac:cxnSpMk id="200" creationId="{4C604A73-FC84-0568-50DD-1A9704143A95}"/>
           </ac:cxnSpMkLst>
         </pc:cxnChg>
-        <pc:cxnChg chg="add del mod">
-          <ac:chgData name="ZUDRELL-KOCH Stefan" userId="e9a6a590-508e-40e7-9af9-9f85dae119b7" providerId="ADAL" clId="{5B748AC7-C77E-493C-A77B-D94156955FEA}" dt="2026-09-01T09:58:17.638" v="1061" actId="478"/>
-          <ac:cxnSpMkLst>
-            <pc:docMk/>
-            <pc:sldMk cId="1526945579" sldId="256"/>
-            <ac:cxnSpMk id="201" creationId="{1A1769BC-C6D1-2958-67A7-EF8068F2F910}"/>
-          </ac:cxnSpMkLst>
-        </pc:cxnChg>
         <pc:cxnChg chg="add mod">
           <ac:chgData name="ZUDRELL-KOCH Stefan" userId="e9a6a590-508e-40e7-9af9-9f85dae119b7" providerId="ADAL" clId="{5B748AC7-C77E-493C-A77B-D94156955FEA}" dt="2026-09-01T09:51:38.799" v="919" actId="1076"/>
           <ac:cxnSpMkLst>
@@ -1985,14 +1329,6 @@
             <ac:cxnSpMk id="224" creationId="{ECF6E34C-AD0E-8928-7D9A-C14595DC59BE}"/>
           </ac:cxnSpMkLst>
         </pc:cxnChg>
-        <pc:cxnChg chg="add del mod">
-          <ac:chgData name="ZUDRELL-KOCH Stefan" userId="e9a6a590-508e-40e7-9af9-9f85dae119b7" providerId="ADAL" clId="{5B748AC7-C77E-493C-A77B-D94156955FEA}" dt="2026-09-01T09:42:24.701" v="683" actId="478"/>
-          <ac:cxnSpMkLst>
-            <pc:docMk/>
-            <pc:sldMk cId="1526945579" sldId="256"/>
-            <ac:cxnSpMk id="230" creationId="{B710FBA7-37CD-6BB9-929F-71006E20C03E}"/>
-          </ac:cxnSpMkLst>
-        </pc:cxnChg>
         <pc:cxnChg chg="add mod">
           <ac:chgData name="ZUDRELL-KOCH Stefan" userId="e9a6a590-508e-40e7-9af9-9f85dae119b7" providerId="ADAL" clId="{5B748AC7-C77E-493C-A77B-D94156955FEA}" dt="2026-09-01T09:45:07.647" v="766" actId="14100"/>
           <ac:cxnSpMkLst>
@@ -2145,14 +1481,6 @@
             <ac:cxnSpMk id="294" creationId="{44977CB9-F3AC-925F-B5D6-3F1C0B6A747B}"/>
           </ac:cxnSpMkLst>
         </pc:cxnChg>
-        <pc:cxnChg chg="add del mod">
-          <ac:chgData name="ZUDRELL-KOCH Stefan" userId="e9a6a590-508e-40e7-9af9-9f85dae119b7" providerId="ADAL" clId="{5B748AC7-C77E-493C-A77B-D94156955FEA}" dt="2026-09-01T14:30:36.159" v="1235" actId="478"/>
-          <ac:cxnSpMkLst>
-            <pc:docMk/>
-            <pc:sldMk cId="1526945579" sldId="256"/>
-            <ac:cxnSpMk id="297" creationId="{57BADE36-72AB-7CFB-89D6-157CC6D0B6EE}"/>
-          </ac:cxnSpMkLst>
-        </pc:cxnChg>
         <pc:cxnChg chg="add mod">
           <ac:chgData name="ZUDRELL-KOCH Stefan" userId="e9a6a590-508e-40e7-9af9-9f85dae119b7" providerId="ADAL" clId="{5B748AC7-C77E-493C-A77B-D94156955FEA}" dt="2026-09-01T09:52:37.135" v="944" actId="14100"/>
           <ac:cxnSpMkLst>
@@ -2177,68 +1505,12 @@
             <ac:cxnSpMk id="308" creationId="{0D3BA19D-4D42-EC9B-A081-6627C6B1872A}"/>
           </ac:cxnSpMkLst>
         </pc:cxnChg>
-        <pc:cxnChg chg="add del mod">
-          <ac:chgData name="ZUDRELL-KOCH Stefan" userId="e9a6a590-508e-40e7-9af9-9f85dae119b7" providerId="ADAL" clId="{5B748AC7-C77E-493C-A77B-D94156955FEA}" dt="2026-09-01T09:57:17.026" v="1046" actId="478"/>
-          <ac:cxnSpMkLst>
-            <pc:docMk/>
-            <pc:sldMk cId="1526945579" sldId="256"/>
-            <ac:cxnSpMk id="309" creationId="{F28AAFD9-4E5A-C424-42BF-1DAFB6830AE1}"/>
-          </ac:cxnSpMkLst>
-        </pc:cxnChg>
-        <pc:cxnChg chg="add del mod">
-          <ac:chgData name="ZUDRELL-KOCH Stefan" userId="e9a6a590-508e-40e7-9af9-9f85dae119b7" providerId="ADAL" clId="{5B748AC7-C77E-493C-A77B-D94156955FEA}" dt="2026-09-01T09:57:17.026" v="1046" actId="478"/>
-          <ac:cxnSpMkLst>
-            <pc:docMk/>
-            <pc:sldMk cId="1526945579" sldId="256"/>
-            <ac:cxnSpMk id="310" creationId="{CBB86DDD-81D3-5CB8-4EE3-3AE4BD3BF8E0}"/>
-          </ac:cxnSpMkLst>
-        </pc:cxnChg>
         <pc:cxnChg chg="add mod">
           <ac:chgData name="ZUDRELL-KOCH Stefan" userId="e9a6a590-508e-40e7-9af9-9f85dae119b7" providerId="ADAL" clId="{5B748AC7-C77E-493C-A77B-D94156955FEA}" dt="2026-09-01T09:54:38.022" v="987" actId="571"/>
           <ac:cxnSpMkLst>
             <pc:docMk/>
             <pc:sldMk cId="1526945579" sldId="256"/>
             <ac:cxnSpMk id="311" creationId="{5FE719DC-0769-C473-0AC4-9FA66E8A8F18}"/>
-          </ac:cxnSpMkLst>
-        </pc:cxnChg>
-        <pc:cxnChg chg="add del mod">
-          <ac:chgData name="ZUDRELL-KOCH Stefan" userId="e9a6a590-508e-40e7-9af9-9f85dae119b7" providerId="ADAL" clId="{5B748AC7-C77E-493C-A77B-D94156955FEA}" dt="2026-09-01T09:54:55.467" v="990" actId="478"/>
-          <ac:cxnSpMkLst>
-            <pc:docMk/>
-            <pc:sldMk cId="1526945579" sldId="256"/>
-            <ac:cxnSpMk id="312" creationId="{4EA84CAF-BD96-BA2A-65F1-D84DFB4C238B}"/>
-          </ac:cxnSpMkLst>
-        </pc:cxnChg>
-        <pc:cxnChg chg="add del mod">
-          <ac:chgData name="ZUDRELL-KOCH Stefan" userId="e9a6a590-508e-40e7-9af9-9f85dae119b7" providerId="ADAL" clId="{5B748AC7-C77E-493C-A77B-D94156955FEA}" dt="2026-09-01T09:54:55.467" v="990" actId="478"/>
-          <ac:cxnSpMkLst>
-            <pc:docMk/>
-            <pc:sldMk cId="1526945579" sldId="256"/>
-            <ac:cxnSpMk id="313" creationId="{19AED25C-61D7-A8D7-DC5B-96E5A90D461A}"/>
-          </ac:cxnSpMkLst>
-        </pc:cxnChg>
-        <pc:cxnChg chg="add del mod">
-          <ac:chgData name="ZUDRELL-KOCH Stefan" userId="e9a6a590-508e-40e7-9af9-9f85dae119b7" providerId="ADAL" clId="{5B748AC7-C77E-493C-A77B-D94156955FEA}" dt="2026-09-01T09:54:55.467" v="990" actId="478"/>
-          <ac:cxnSpMkLst>
-            <pc:docMk/>
-            <pc:sldMk cId="1526945579" sldId="256"/>
-            <ac:cxnSpMk id="314" creationId="{C37F2928-2D3B-A520-3A58-890D6A8B3666}"/>
-          </ac:cxnSpMkLst>
-        </pc:cxnChg>
-        <pc:cxnChg chg="add del mod">
-          <ac:chgData name="ZUDRELL-KOCH Stefan" userId="e9a6a590-508e-40e7-9af9-9f85dae119b7" providerId="ADAL" clId="{5B748AC7-C77E-493C-A77B-D94156955FEA}" dt="2026-09-01T09:54:55.467" v="990" actId="478"/>
-          <ac:cxnSpMkLst>
-            <pc:docMk/>
-            <pc:sldMk cId="1526945579" sldId="256"/>
-            <ac:cxnSpMk id="315" creationId="{C625CCD3-6518-2C5C-5458-B239990DD7B0}"/>
-          </ac:cxnSpMkLst>
-        </pc:cxnChg>
-        <pc:cxnChg chg="add del mod">
-          <ac:chgData name="ZUDRELL-KOCH Stefan" userId="e9a6a590-508e-40e7-9af9-9f85dae119b7" providerId="ADAL" clId="{5B748AC7-C77E-493C-A77B-D94156955FEA}" dt="2026-09-01T09:54:55.467" v="990" actId="478"/>
-          <ac:cxnSpMkLst>
-            <pc:docMk/>
-            <pc:sldMk cId="1526945579" sldId="256"/>
-            <ac:cxnSpMk id="316" creationId="{539F0803-CD3B-4DDD-C9D4-A5B48225791F}"/>
           </ac:cxnSpMkLst>
         </pc:cxnChg>
         <pc:cxnChg chg="add mod">
@@ -2247,14 +1519,6 @@
             <pc:docMk/>
             <pc:sldMk cId="1526945579" sldId="256"/>
             <ac:cxnSpMk id="322" creationId="{9C37B10E-7436-CB29-16FA-728568BE75F8}"/>
-          </ac:cxnSpMkLst>
-        </pc:cxnChg>
-        <pc:cxnChg chg="add del mod">
-          <ac:chgData name="ZUDRELL-KOCH Stefan" userId="e9a6a590-508e-40e7-9af9-9f85dae119b7" providerId="ADAL" clId="{5B748AC7-C77E-493C-A77B-D94156955FEA}" dt="2026-09-01T09:55:35.210" v="1007" actId="478"/>
-          <ac:cxnSpMkLst>
-            <pc:docMk/>
-            <pc:sldMk cId="1526945579" sldId="256"/>
-            <ac:cxnSpMk id="325" creationId="{6A8EFD5F-03B1-01CE-798F-3BD4CF1D41AD}"/>
           </ac:cxnSpMkLst>
         </pc:cxnChg>
         <pc:cxnChg chg="add mod">
@@ -2295,14 +1559,6 @@
             <pc:docMk/>
             <pc:sldMk cId="1526945579" sldId="256"/>
             <ac:cxnSpMk id="334" creationId="{ED2F4C59-D72D-6E85-A6EA-343EA62DB6A0}"/>
-          </ac:cxnSpMkLst>
-        </pc:cxnChg>
-        <pc:cxnChg chg="add del mod">
-          <ac:chgData name="ZUDRELL-KOCH Stefan" userId="e9a6a590-508e-40e7-9af9-9f85dae119b7" providerId="ADAL" clId="{5B748AC7-C77E-493C-A77B-D94156955FEA}" dt="2026-09-01T09:57:14.286" v="1045" actId="478"/>
-          <ac:cxnSpMkLst>
-            <pc:docMk/>
-            <pc:sldMk cId="1526945579" sldId="256"/>
-            <ac:cxnSpMk id="335" creationId="{11BA2508-579A-BBBD-D3C3-5656D1EBA71C}"/>
           </ac:cxnSpMkLst>
         </pc:cxnChg>
         <pc:cxnChg chg="add mod">
@@ -2389,20 +1645,6 @@
             </pc226:cmChg>
           </p:ext>
         </pc:extLst>
-      </pc:sldChg>
-      <pc:sldChg chg="del">
-        <pc:chgData name="ZUDRELL-KOCH Stefan" userId="e9a6a590-508e-40e7-9af9-9f85dae119b7" providerId="ADAL" clId="{5B748AC7-C77E-493C-A77B-D94156955FEA}" dt="2026-09-01T10:02:03.729" v="1158" actId="47"/>
-        <pc:sldMkLst>
-          <pc:docMk/>
-          <pc:sldMk cId="4162380527" sldId="257"/>
-        </pc:sldMkLst>
-      </pc:sldChg>
-      <pc:sldChg chg="del">
-        <pc:chgData name="ZUDRELL-KOCH Stefan" userId="e9a6a590-508e-40e7-9af9-9f85dae119b7" providerId="ADAL" clId="{5B748AC7-C77E-493C-A77B-D94156955FEA}" dt="2026-09-01T10:02:03.729" v="1158" actId="47"/>
-        <pc:sldMkLst>
-          <pc:docMk/>
-          <pc:sldMk cId="2392292793" sldId="258"/>
-        </pc:sldMkLst>
       </pc:sldChg>
     </pc:docChg>
   </pc:docChgLst>
@@ -2579,7 +1821,7 @@
           <a:p>
             <a:fld id="{947D09D9-B83C-4878-A817-319374DDF0C7}" type="datetimeFigureOut">
               <a:rPr lang="de-AT" smtClean="0"/>
-              <a:t>01.09.2026</a:t>
+              <a:t>06.09.2026</a:t>
             </a:fld>
             <a:endParaRPr lang="de-AT"/>
           </a:p>
@@ -2779,7 +2021,7 @@
           <a:p>
             <a:fld id="{947D09D9-B83C-4878-A817-319374DDF0C7}" type="datetimeFigureOut">
               <a:rPr lang="de-AT" smtClean="0"/>
-              <a:t>01.09.2026</a:t>
+              <a:t>06.09.2026</a:t>
             </a:fld>
             <a:endParaRPr lang="de-AT"/>
           </a:p>
@@ -2989,7 +2231,7 @@
           <a:p>
             <a:fld id="{947D09D9-B83C-4878-A817-319374DDF0C7}" type="datetimeFigureOut">
               <a:rPr lang="de-AT" smtClean="0"/>
-              <a:t>01.09.2026</a:t>
+              <a:t>06.09.2026</a:t>
             </a:fld>
             <a:endParaRPr lang="de-AT"/>
           </a:p>
@@ -3189,7 +2431,7 @@
           <a:p>
             <a:fld id="{947D09D9-B83C-4878-A817-319374DDF0C7}" type="datetimeFigureOut">
               <a:rPr lang="de-AT" smtClean="0"/>
-              <a:t>01.09.2026</a:t>
+              <a:t>06.09.2026</a:t>
             </a:fld>
             <a:endParaRPr lang="de-AT"/>
           </a:p>
@@ -3465,7 +2707,7 @@
           <a:p>
             <a:fld id="{947D09D9-B83C-4878-A817-319374DDF0C7}" type="datetimeFigureOut">
               <a:rPr lang="de-AT" smtClean="0"/>
-              <a:t>01.09.2026</a:t>
+              <a:t>06.09.2026</a:t>
             </a:fld>
             <a:endParaRPr lang="de-AT"/>
           </a:p>
@@ -3733,7 +2975,7 @@
           <a:p>
             <a:fld id="{947D09D9-B83C-4878-A817-319374DDF0C7}" type="datetimeFigureOut">
               <a:rPr lang="de-AT" smtClean="0"/>
-              <a:t>01.09.2026</a:t>
+              <a:t>06.09.2026</a:t>
             </a:fld>
             <a:endParaRPr lang="de-AT"/>
           </a:p>
@@ -4148,7 +3390,7 @@
           <a:p>
             <a:fld id="{947D09D9-B83C-4878-A817-319374DDF0C7}" type="datetimeFigureOut">
               <a:rPr lang="de-AT" smtClean="0"/>
-              <a:t>01.09.2026</a:t>
+              <a:t>06.09.2026</a:t>
             </a:fld>
             <a:endParaRPr lang="de-AT"/>
           </a:p>
@@ -4290,7 +3532,7 @@
           <a:p>
             <a:fld id="{947D09D9-B83C-4878-A817-319374DDF0C7}" type="datetimeFigureOut">
               <a:rPr lang="de-AT" smtClean="0"/>
-              <a:t>01.09.2026</a:t>
+              <a:t>06.09.2026</a:t>
             </a:fld>
             <a:endParaRPr lang="de-AT"/>
           </a:p>
@@ -4403,7 +3645,7 @@
           <a:p>
             <a:fld id="{947D09D9-B83C-4878-A817-319374DDF0C7}" type="datetimeFigureOut">
               <a:rPr lang="de-AT" smtClean="0"/>
-              <a:t>01.09.2026</a:t>
+              <a:t>06.09.2026</a:t>
             </a:fld>
             <a:endParaRPr lang="de-AT"/>
           </a:p>
@@ -4716,7 +3958,7 @@
           <a:p>
             <a:fld id="{947D09D9-B83C-4878-A817-319374DDF0C7}" type="datetimeFigureOut">
               <a:rPr lang="de-AT" smtClean="0"/>
-              <a:t>01.09.2026</a:t>
+              <a:t>06.09.2026</a:t>
             </a:fld>
             <a:endParaRPr lang="de-AT"/>
           </a:p>
@@ -5005,7 +4247,7 @@
           <a:p>
             <a:fld id="{947D09D9-B83C-4878-A817-319374DDF0C7}" type="datetimeFigureOut">
               <a:rPr lang="de-AT" smtClean="0"/>
-              <a:t>01.09.2026</a:t>
+              <a:t>06.09.2026</a:t>
             </a:fld>
             <a:endParaRPr lang="de-AT"/>
           </a:p>
@@ -5248,7 +4490,7 @@
           <a:p>
             <a:fld id="{947D09D9-B83C-4878-A817-319374DDF0C7}" type="datetimeFigureOut">
               <a:rPr lang="de-AT" smtClean="0"/>
-              <a:t>01.09.2026</a:t>
+              <a:t>06.09.2026</a:t>
             </a:fld>
             <a:endParaRPr lang="de-AT"/>
           </a:p>
@@ -13599,6 +12841,111 @@
           </a:p>
         </p:txBody>
       </p:sp>
+      <p:cxnSp>
+        <p:nvCxnSpPr>
+          <p:cNvPr id="34" name="Gerader Verbinder 33">
+            <a:extLst>
+              <a:ext uri="{FF2B5EF4-FFF2-40B4-BE49-F238E27FC236}">
+                <a16:creationId xmlns:a16="http://schemas.microsoft.com/office/drawing/2014/main" id="{BDB01C14-BE19-EEF7-5228-DE64F36FB1D6}"/>
+              </a:ext>
+            </a:extLst>
+          </p:cNvPr>
+          <p:cNvCxnSpPr>
+            <a:cxnSpLocks/>
+          </p:cNvCxnSpPr>
+          <p:nvPr/>
+        </p:nvCxnSpPr>
+        <p:spPr>
+          <a:xfrm>
+            <a:off x="6332987" y="3537012"/>
+            <a:ext cx="0" cy="324036"/>
+          </a:xfrm>
+          <a:prstGeom prst="line">
+            <a:avLst/>
+          </a:prstGeom>
+          <a:ln w="38100">
+            <a:solidFill>
+              <a:srgbClr val="7030A0"/>
+            </a:solidFill>
+            <a:headEnd type="triangle" w="med" len="med"/>
+            <a:tailEnd type="triangle" w="med" len="med"/>
+          </a:ln>
+        </p:spPr>
+        <p:style>
+          <a:lnRef idx="1">
+            <a:schemeClr val="accent1"/>
+          </a:lnRef>
+          <a:fillRef idx="0">
+            <a:schemeClr val="accent1"/>
+          </a:fillRef>
+          <a:effectRef idx="0">
+            <a:schemeClr val="accent1"/>
+          </a:effectRef>
+          <a:fontRef idx="minor">
+            <a:schemeClr val="tx1"/>
+          </a:fontRef>
+        </p:style>
+      </p:cxnSp>
+      <p:sp>
+        <p:nvSpPr>
+          <p:cNvPr id="69" name="Textfeld 68">
+            <a:extLst>
+              <a:ext uri="{FF2B5EF4-FFF2-40B4-BE49-F238E27FC236}">
+                <a16:creationId xmlns:a16="http://schemas.microsoft.com/office/drawing/2014/main" id="{DE1E0CAD-3FE6-24CD-C081-F1B230365597}"/>
+              </a:ext>
+            </a:extLst>
+          </p:cNvPr>
+          <p:cNvSpPr txBox="1"/>
+          <p:nvPr/>
+        </p:nvSpPr>
+        <p:spPr>
+          <a:xfrm>
+            <a:off x="6059996" y="3825044"/>
+            <a:ext cx="567784" cy="400110"/>
+          </a:xfrm>
+          <a:prstGeom prst="rect">
+            <a:avLst/>
+          </a:prstGeom>
+          <a:noFill/>
+        </p:spPr>
+        <p:txBody>
+          <a:bodyPr wrap="none" rtlCol="0">
+            <a:spAutoFit/>
+          </a:bodyPr>
+          <a:lstStyle/>
+          <a:p>
+            <a:pPr algn="ctr"/>
+            <a:r>
+              <a:rPr lang="de-AT" sz="1000" b="1" dirty="0">
+                <a:solidFill>
+                  <a:srgbClr val="7030A0"/>
+                </a:solidFill>
+              </a:rPr>
+              <a:t>Via</a:t>
+            </a:r>
+            <a:br>
+              <a:rPr lang="de-AT" sz="1000" b="1" dirty="0">
+                <a:solidFill>
+                  <a:srgbClr val="7030A0"/>
+                </a:solidFill>
+              </a:rPr>
+            </a:br>
+            <a:r>
+              <a:rPr lang="de-AT" sz="1000" b="1" dirty="0" err="1">
+                <a:solidFill>
+                  <a:srgbClr val="7030A0"/>
+                </a:solidFill>
+              </a:rPr>
+              <a:t>jumper</a:t>
+            </a:r>
+            <a:endParaRPr lang="de-AT" sz="1000" b="1" dirty="0">
+              <a:solidFill>
+                <a:srgbClr val="7030A0"/>
+              </a:solidFill>
+            </a:endParaRPr>
+          </a:p>
+        </p:txBody>
+      </p:sp>
     </p:spTree>
     <p:extLst>
       <p:ext uri="{BB962C8B-B14F-4D97-AF65-F5344CB8AC3E}">
